--- a/data/employees/EMP002/AST-EMP002-01.pptx
+++ b/data/employees/EMP002/AST-EMP002-01.pptx
@@ -9,6 +9,7 @@
     <p:sldId id="257" r:id="rId8"/>
     <p:sldId id="258" r:id="rId9"/>
     <p:sldId id="259" r:id="rId10"/>
+    <p:sldId id="260" r:id="rId11"/>
   </p:sldIdLst>
   <p:sldSz cx="9144000" cy="6858000" type="screen4x3"/>
   <p:notesSz cx="6858000" cy="9144000"/>
@@ -3098,42 +3099,55 @@
             <a:spLocks noGrp="1"/>
           </p:cNvSpPr>
           <p:nvPr>
-            <p:ph type="ctrTitle"/>
-          </p:nvPr>
-        </p:nvSpPr>
-        <p:spPr/>
-        <p:txBody>
-          <a:bodyPr/>
-          <a:lstStyle/>
-          <a:p>
-            <a:r>
-              <a:t>Project update deck - EMP002</a:t>
-            </a:r>
-          </a:p>
-        </p:txBody>
-      </p:sp>
-      <p:sp>
-        <p:nvSpPr>
-          <p:cNvPr id="3" name="Subtitle 2"/>
-          <p:cNvSpPr>
-            <a:spLocks noGrp="1"/>
-          </p:cNvSpPr>
-          <p:nvPr>
-            <p:ph type="subTitle" idx="1"/>
-          </p:nvPr>
-        </p:nvSpPr>
-        <p:spPr/>
-        <p:txBody>
-          <a:bodyPr/>
-          <a:lstStyle/>
-          <a:p>
-            <a:r>
-              <a:t>Jordan Nguyen | Manager | HR</a:t>
-            </a:r>
-          </a:p>
-          <a:p>
-            <a:r>
-              <a:t>Prepared: 2025-01-04</a:t>
+            <p:ph type="title"/>
+          </p:nvPr>
+        </p:nvSpPr>
+        <p:spPr/>
+        <p:txBody>
+          <a:bodyPr/>
+          <a:lstStyle/>
+          <a:p>
+            <a:r>
+              <a:t>Ast Emp002 01 - EMP002</a:t>
+            </a:r>
+          </a:p>
+        </p:txBody>
+      </p:sp>
+      <p:sp>
+        <p:nvSpPr>
+          <p:cNvPr id="3" name="Content Placeholder 2"/>
+          <p:cNvSpPr>
+            <a:spLocks noGrp="1"/>
+          </p:cNvSpPr>
+          <p:nvPr>
+            <p:ph idx="1"/>
+          </p:nvPr>
+        </p:nvSpPr>
+        <p:spPr/>
+        <p:txBody>
+          <a:bodyPr/>
+          <a:lstStyle/>
+          <a:p>
+            <a:r>
+              <a:t>Slide 1: Executive Summary</a:t>
+            </a:r>
+          </a:p>
+          <a:p>
+            <a:pPr lvl="1"/>
+            <a:r>
+              <a:t>Section 1: Quarterly delivery milestones. EMP002 contributes to ast emp002 01 through recurring collaboration, clear ownership boundaries, and measurable outcomes. The team captures decisions, open issues, and handoffs so that knowledge remains discoverable for future programs.</a:t>
+            </a:r>
+          </a:p>
+          <a:p>
+            <a:pPr lvl="1"/>
+            <a:r>
+              <a:t>Section 2: Data quality remediation. EMP002 contributes to ast emp002 01 through recurring collaboration, clear ownership boundaries, and measurable outcomes. The team captures decisions, open issues, and handoffs so that knowledge remains discoverable for future programs.</a:t>
+            </a:r>
+          </a:p>
+          <a:p>
+            <a:pPr lvl="1"/>
+            <a:r>
+              <a:t>Section 3: Customer escalation analysis. EMP002 contributes to ast emp002 01 through recurring collaboration, clear ownership boundaries, and measurable outcomes. The team captures decisions, open issues, and handoffs so that knowledge remains discoverable for future programs.</a:t>
             </a:r>
           </a:p>
         </p:txBody>
@@ -3172,7 +3186,7 @@
           <a:lstStyle/>
           <a:p>
             <a:r>
-              <a:t>Q2 Talent Acquisition Update</a:t>
+              <a:t>Ast Emp002 01 - EMP002</a:t>
             </a:r>
           </a:p>
         </p:txBody>
@@ -3193,17 +3207,25 @@
           <a:lstStyle/>
           <a:p>
             <a:r>
-              <a:t>Overview of Q2 Talent Acquisition Update for HR department.</a:t>
-            </a:r>
-          </a:p>
-          <a:p>
-            <a:r>
-              <a:t>Responsible: Jordan Nguyen (Manager)</a:t>
-            </a:r>
-          </a:p>
-          <a:p>
-            <a:r>
-              <a:t>Location: Portland | Skills: Power BI, Ontology, Kusto, Fabric</a:t>
+              <a:t>Slide 2: Executive Summary</a:t>
+            </a:r>
+          </a:p>
+          <a:p>
+            <a:pPr lvl="1"/>
+            <a:r>
+              <a:t>Section 1: Automation backlog refinement. EMP002 contributes to ast emp002 01 through recurring collaboration, clear ownership boundaries, and measurable outcomes. The team captures decisions, open issues, and handoffs so that knowledge remains discoverable for future programs.</a:t>
+            </a:r>
+          </a:p>
+          <a:p>
+            <a:pPr lvl="1"/>
+            <a:r>
+              <a:t>Section 2: Data quality remediation. EMP002 contributes to ast emp002 01 through recurring collaboration, clear ownership boundaries, and measurable outcomes. The team captures decisions, open issues, and handoffs so that knowledge remains discoverable for future programs.</a:t>
+            </a:r>
+          </a:p>
+          <a:p>
+            <a:pPr lvl="1"/>
+            <a:r>
+              <a:t>Section 3: Quarterly delivery milestones. EMP002 contributes to ast emp002 01 through recurring collaboration, clear ownership boundaries, and measurable outcomes. The team captures decisions, open issues, and handoffs so that knowledge remains discoverable for future programs.</a:t>
             </a:r>
           </a:p>
         </p:txBody>
@@ -3242,7 +3264,7 @@
           <a:lstStyle/>
           <a:p>
             <a:r>
-              <a:t>Employee Engagement Scores</a:t>
+              <a:t>Ast Emp002 01 - EMP002</a:t>
             </a:r>
           </a:p>
         </p:txBody>
@@ -3263,17 +3285,25 @@
           <a:lstStyle/>
           <a:p>
             <a:r>
-              <a:t>Overview of Employee Engagement Scores for HR department.</a:t>
-            </a:r>
-          </a:p>
-          <a:p>
-            <a:r>
-              <a:t>Responsible: Jordan Nguyen (Manager)</a:t>
-            </a:r>
-          </a:p>
-          <a:p>
-            <a:r>
-              <a:t>Location: Portland | Skills: Power BI, Ontology, Kusto, Fabric</a:t>
+              <a:t>Slide 3: Executive Summary</a:t>
+            </a:r>
+          </a:p>
+          <a:p>
+            <a:pPr lvl="1"/>
+            <a:r>
+              <a:t>Section 1: Department KPI performance. EMP002 contributes to ast emp002 01 through recurring collaboration, clear ownership boundaries, and measurable outcomes. The team captures decisions, open issues, and handoffs so that knowledge remains discoverable for future programs.</a:t>
+            </a:r>
+          </a:p>
+          <a:p>
+            <a:pPr lvl="1"/>
+            <a:r>
+              <a:t>Section 2: Automation backlog refinement. EMP002 contributes to ast emp002 01 through recurring collaboration, clear ownership boundaries, and measurable outcomes. The team captures decisions, open issues, and handoffs so that knowledge remains discoverable for future programs.</a:t>
+            </a:r>
+          </a:p>
+          <a:p>
+            <a:pPr lvl="1"/>
+            <a:r>
+              <a:t>Section 3: Automation backlog refinement. EMP002 contributes to ast emp002 01 through recurring collaboration, clear ownership boundaries, and measurable outcomes. The team captures decisions, open issues, and handoffs so that knowledge remains discoverable for future programs.</a:t>
             </a:r>
           </a:p>
         </p:txBody>
@@ -3312,7 +3342,7 @@
           <a:lstStyle/>
           <a:p>
             <a:r>
-              <a:t>Learning &amp; Development Roadmap</a:t>
+              <a:t>Ast Emp002 01 - EMP002</a:t>
             </a:r>
           </a:p>
         </p:txBody>
@@ -3333,17 +3363,103 @@
           <a:lstStyle/>
           <a:p>
             <a:r>
-              <a:t>Overview of Learning &amp; Development Roadmap for HR department.</a:t>
-            </a:r>
-          </a:p>
-          <a:p>
-            <a:r>
-              <a:t>Responsible: Jordan Nguyen (Manager)</a:t>
-            </a:r>
-          </a:p>
-          <a:p>
-            <a:r>
-              <a:t>Location: Portland | Skills: Power BI, Ontology, Kusto, Fabric</a:t>
+              <a:t>Slide 4: Executive Summary</a:t>
+            </a:r>
+          </a:p>
+          <a:p>
+            <a:pPr lvl="1"/>
+            <a:r>
+              <a:t>Section 1: Department KPI performance. EMP002 contributes to ast emp002 01 through recurring collaboration, clear ownership boundaries, and measurable outcomes. The team captures decisions, open issues, and handoffs so that knowledge remains discoverable for future programs.</a:t>
+            </a:r>
+          </a:p>
+          <a:p>
+            <a:pPr lvl="1"/>
+            <a:r>
+              <a:t>Section 2: Fabric semantic model planning. EMP002 contributes to ast emp002 01 through recurring collaboration, clear ownership boundaries, and measurable outcomes. The team captures decisions, open issues, and handoffs so that knowledge remains discoverable for future programs.</a:t>
+            </a:r>
+          </a:p>
+          <a:p>
+            <a:pPr lvl="1"/>
+            <a:r>
+              <a:t>Section 3: Data quality remediation. EMP002 contributes to ast emp002 01 through recurring collaboration, clear ownership boundaries, and measurable outcomes. The team captures decisions, open issues, and handoffs so that knowledge remains discoverable for future programs.</a:t>
+            </a:r>
+          </a:p>
+        </p:txBody>
+      </p:sp>
+    </p:spTree>
+  </p:cSld>
+  <p:clrMapOvr>
+    <a:masterClrMapping/>
+  </p:clrMapOvr>
+</p:sld>
+</file>
+
+<file path=ppt/slides/slide5.xml><?xml version="1.0" encoding="utf-8"?>
+<p:sld xmlns:a="http://schemas.openxmlformats.org/drawingml/2006/main" xmlns:p="http://schemas.openxmlformats.org/presentationml/2006/main" xmlns:r="http://schemas.openxmlformats.org/officeDocument/2006/relationships">
+  <p:cSld>
+    <p:spTree>
+      <p:nvGrpSpPr>
+        <p:cNvPr id="1" name=""/>
+        <p:cNvGrpSpPr/>
+        <p:nvPr/>
+      </p:nvGrpSpPr>
+      <p:grpSpPr/>
+      <p:sp>
+        <p:nvSpPr>
+          <p:cNvPr id="2" name="Title 1"/>
+          <p:cNvSpPr>
+            <a:spLocks noGrp="1"/>
+          </p:cNvSpPr>
+          <p:nvPr>
+            <p:ph type="title"/>
+          </p:nvPr>
+        </p:nvSpPr>
+        <p:spPr/>
+        <p:txBody>
+          <a:bodyPr/>
+          <a:lstStyle/>
+          <a:p>
+            <a:r>
+              <a:t>Ast Emp002 01 - EMP002</a:t>
+            </a:r>
+          </a:p>
+        </p:txBody>
+      </p:sp>
+      <p:sp>
+        <p:nvSpPr>
+          <p:cNvPr id="3" name="Content Placeholder 2"/>
+          <p:cNvSpPr>
+            <a:spLocks noGrp="1"/>
+          </p:cNvSpPr>
+          <p:nvPr>
+            <p:ph idx="1"/>
+          </p:nvPr>
+        </p:nvSpPr>
+        <p:spPr/>
+        <p:txBody>
+          <a:bodyPr/>
+          <a:lstStyle/>
+          <a:p>
+            <a:r>
+              <a:t>Slide 5: Executive Summary</a:t>
+            </a:r>
+          </a:p>
+          <a:p>
+            <a:pPr lvl="1"/>
+            <a:r>
+              <a:t>Section 1: Department KPI performance. EMP002 contributes to ast emp002 01 through recurring collaboration, clear ownership boundaries, and measurable outcomes. The team captures decisions, open issues, and handoffs so that knowledge remains discoverable for future programs.</a:t>
+            </a:r>
+          </a:p>
+          <a:p>
+            <a:pPr lvl="1"/>
+            <a:r>
+              <a:t>Section 2: Fabric semantic model planning. EMP002 contributes to ast emp002 01 through recurring collaboration, clear ownership boundaries, and measurable outcomes. The team captures decisions, open issues, and handoffs so that knowledge remains discoverable for future programs.</a:t>
+            </a:r>
+          </a:p>
+          <a:p>
+            <a:pPr lvl="1"/>
+            <a:r>
+              <a:t>Section 3: Fabric semantic model planning. EMP002 contributes to ast emp002 01 through recurring collaboration, clear ownership boundaries, and measurable outcomes. The team captures decisions, open issues, and handoffs so that knowledge remains discoverable for future programs.</a:t>
             </a:r>
           </a:p>
         </p:txBody>
